--- a/docs/presentaciones/classes/clase-128-capas-convolucionales-filtros-feature-maps-presentacion.pptx
+++ b/docs/presentaciones/classes/clase-128-capas-convolucionales-filtros-feature-maps-presentacion.pptx
@@ -4910,7 +4910,349 @@
                 </a:solidFill>
                 <a:latin typeface="Courier New"/>
               </a:rPr>
-              <a:t># Imports y configuración inicial</a:t>
+              <a:t>import numpy as np</a:t>
+            </a:r>
+          </a:p>
+          <a:p>
+            <a:pPr>
+              <a:defRPr sz="1200" b="0">
+                <a:solidFill>
+                  <a:srgbClr val="F8FAFC"/>
+                </a:solidFill>
+                <a:latin typeface="Courier New"/>
+              </a:defRPr>
+            </a:pPr>
+            <a:r>
+              <a:rPr sz="1200" b="0">
+                <a:solidFill>
+                  <a:srgbClr val="F8FAFC"/>
+                </a:solidFill>
+                <a:latin typeface="Courier New"/>
+              </a:rPr>
+              <a:t>from scipy.signal import convolve2d</a:t>
+            </a:r>
+          </a:p>
+          <a:p>
+            <a:pPr>
+              <a:defRPr sz="1200" b="0">
+                <a:solidFill>
+                  <a:srgbClr val="F8FAFC"/>
+                </a:solidFill>
+                <a:latin typeface="Courier New"/>
+              </a:defRPr>
+            </a:pPr>
+            <a:r>
+              <a:rPr sz="1200" b="0">
+                <a:solidFill>
+                  <a:srgbClr val="F8FAFC"/>
+                </a:solidFill>
+                <a:latin typeface="Courier New"/>
+              </a:rPr>
+              <a:t> </a:t>
+            </a:r>
+          </a:p>
+          <a:p>
+            <a:pPr>
+              <a:defRPr sz="1200" b="0">
+                <a:solidFill>
+                  <a:srgbClr val="F8FAFC"/>
+                </a:solidFill>
+                <a:latin typeface="Courier New"/>
+              </a:defRPr>
+            </a:pPr>
+            <a:r>
+              <a:rPr sz="1200" b="0">
+                <a:solidFill>
+                  <a:srgbClr val="F8FAFC"/>
+                </a:solidFill>
+                <a:latin typeface="Courier New"/>
+              </a:rPr>
+              <a:t># Imagen sintética 6x6 con un borde vertical (mitad derecha encendida)</a:t>
+            </a:r>
+          </a:p>
+          <a:p>
+            <a:pPr>
+              <a:defRPr sz="1200" b="0">
+                <a:solidFill>
+                  <a:srgbClr val="F8FAFC"/>
+                </a:solidFill>
+                <a:latin typeface="Courier New"/>
+              </a:defRPr>
+            </a:pPr>
+            <a:r>
+              <a:rPr sz="1200" b="0">
+                <a:solidFill>
+                  <a:srgbClr val="F8FAFC"/>
+                </a:solidFill>
+                <a:latin typeface="Courier New"/>
+              </a:rPr>
+              <a:t>img = np.zeros((6, 6), dtype=np.float32)</a:t>
+            </a:r>
+          </a:p>
+          <a:p>
+            <a:pPr>
+              <a:defRPr sz="1200" b="0">
+                <a:solidFill>
+                  <a:srgbClr val="F8FAFC"/>
+                </a:solidFill>
+                <a:latin typeface="Courier New"/>
+              </a:defRPr>
+            </a:pPr>
+            <a:r>
+              <a:rPr sz="1200" b="0">
+                <a:solidFill>
+                  <a:srgbClr val="F8FAFC"/>
+                </a:solidFill>
+                <a:latin typeface="Courier New"/>
+              </a:rPr>
+              <a:t>img[:, 3:] = 1.0</a:t>
+            </a:r>
+          </a:p>
+          <a:p>
+            <a:pPr>
+              <a:defRPr sz="1200" b="0">
+                <a:solidFill>
+                  <a:srgbClr val="F8FAFC"/>
+                </a:solidFill>
+                <a:latin typeface="Courier New"/>
+              </a:defRPr>
+            </a:pPr>
+            <a:r>
+              <a:rPr sz="1200" b="0">
+                <a:solidFill>
+                  <a:srgbClr val="F8FAFC"/>
+                </a:solidFill>
+                <a:latin typeface="Courier New"/>
+              </a:rPr>
+              <a:t> </a:t>
+            </a:r>
+          </a:p>
+          <a:p>
+            <a:pPr>
+              <a:defRPr sz="1200" b="0">
+                <a:solidFill>
+                  <a:srgbClr val="F8FAFC"/>
+                </a:solidFill>
+                <a:latin typeface="Courier New"/>
+              </a:defRPr>
+            </a:pPr>
+            <a:r>
+              <a:rPr sz="1200" b="0">
+                <a:solidFill>
+                  <a:srgbClr val="F8FAFC"/>
+                </a:solidFill>
+                <a:latin typeface="Courier New"/>
+              </a:rPr>
+              <a:t># Kernel Sobel-x: detecta bordes verticales</a:t>
+            </a:r>
+          </a:p>
+          <a:p>
+            <a:pPr>
+              <a:defRPr sz="1200" b="0">
+                <a:solidFill>
+                  <a:srgbClr val="F8FAFC"/>
+                </a:solidFill>
+                <a:latin typeface="Courier New"/>
+              </a:defRPr>
+            </a:pPr>
+            <a:r>
+              <a:rPr sz="1200" b="0">
+                <a:solidFill>
+                  <a:srgbClr val="F8FAFC"/>
+                </a:solidFill>
+                <a:latin typeface="Courier New"/>
+              </a:rPr>
+              <a:t>sobel_x = np.array([[-1, 0, 1],</a:t>
+            </a:r>
+          </a:p>
+          <a:p>
+            <a:pPr>
+              <a:defRPr sz="1200" b="0">
+                <a:solidFill>
+                  <a:srgbClr val="F8FAFC"/>
+                </a:solidFill>
+                <a:latin typeface="Courier New"/>
+              </a:defRPr>
+            </a:pPr>
+            <a:r>
+              <a:rPr sz="1200" b="0">
+                <a:solidFill>
+                  <a:srgbClr val="F8FAFC"/>
+                </a:solidFill>
+                <a:latin typeface="Courier New"/>
+              </a:rPr>
+              <a:t>                    [-2, 0, 2],</a:t>
+            </a:r>
+          </a:p>
+          <a:p>
+            <a:pPr>
+              <a:defRPr sz="1200" b="0">
+                <a:solidFill>
+                  <a:srgbClr val="F8FAFC"/>
+                </a:solidFill>
+                <a:latin typeface="Courier New"/>
+              </a:defRPr>
+            </a:pPr>
+            <a:r>
+              <a:rPr sz="1200" b="0">
+                <a:solidFill>
+                  <a:srgbClr val="F8FAFC"/>
+                </a:solidFill>
+                <a:latin typeface="Courier New"/>
+              </a:rPr>
+              <a:t>                    [-1, 0, 1]], dtype=np.float32)</a:t>
+            </a:r>
+          </a:p>
+          <a:p>
+            <a:pPr>
+              <a:defRPr sz="1200" b="0">
+                <a:solidFill>
+                  <a:srgbClr val="F8FAFC"/>
+                </a:solidFill>
+                <a:latin typeface="Courier New"/>
+              </a:defRPr>
+            </a:pPr>
+            <a:r>
+              <a:rPr sz="1200" b="0">
+                <a:solidFill>
+                  <a:srgbClr val="F8FAFC"/>
+                </a:solidFill>
+                <a:latin typeface="Courier New"/>
+              </a:rPr>
+              <a:t> </a:t>
+            </a:r>
+          </a:p>
+          <a:p>
+            <a:pPr>
+              <a:defRPr sz="1200" b="0">
+                <a:solidFill>
+                  <a:srgbClr val="F8FAFC"/>
+                </a:solidFill>
+                <a:latin typeface="Courier New"/>
+              </a:defRPr>
+            </a:pPr>
+            <a:r>
+              <a:rPr sz="1200" b="0">
+                <a:solidFill>
+                  <a:srgbClr val="F8FAFC"/>
+                </a:solidFill>
+                <a:latin typeface="Courier New"/>
+              </a:rPr>
+              <a:t># 'valid' (sin padding) reduce el tamaño; 'same' lo preserva con zeros</a:t>
+            </a:r>
+          </a:p>
+          <a:p>
+            <a:pPr>
+              <a:defRPr sz="1200" b="0">
+                <a:solidFill>
+                  <a:srgbClr val="F8FAFC"/>
+                </a:solidFill>
+                <a:latin typeface="Courier New"/>
+              </a:defRPr>
+            </a:pPr>
+            <a:r>
+              <a:rPr sz="1200" b="0">
+                <a:solidFill>
+                  <a:srgbClr val="F8FAFC"/>
+                </a:solidFill>
+                <a:latin typeface="Courier New"/>
+              </a:rPr>
+              <a:t>fmap_valid = convolve2d(img, sobel_x, mode="valid")</a:t>
+            </a:r>
+          </a:p>
+          <a:p>
+            <a:pPr>
+              <a:defRPr sz="1200" b="0">
+                <a:solidFill>
+                  <a:srgbClr val="F8FAFC"/>
+                </a:solidFill>
+                <a:latin typeface="Courier New"/>
+              </a:defRPr>
+            </a:pPr>
+            <a:r>
+              <a:rPr sz="1200" b="0">
+                <a:solidFill>
+                  <a:srgbClr val="F8FAFC"/>
+                </a:solidFill>
+                <a:latin typeface="Courier New"/>
+              </a:rPr>
+              <a:t>fmap_same = convolve2d(img, sobel_x, mode="same")</a:t>
+            </a:r>
+          </a:p>
+          <a:p>
+            <a:pPr>
+              <a:defRPr sz="1200" b="0">
+                <a:solidFill>
+                  <a:srgbClr val="F8FAFC"/>
+                </a:solidFill>
+                <a:latin typeface="Courier New"/>
+              </a:defRPr>
+            </a:pPr>
+            <a:r>
+              <a:rPr sz="1200" b="0">
+                <a:solidFill>
+                  <a:srgbClr val="F8FAFC"/>
+                </a:solidFill>
+                <a:latin typeface="Courier New"/>
+              </a:rPr>
+              <a:t>print("entrada:", img.shape, "-&gt; valid:", fmap_valid.shape,</a:t>
+            </a:r>
+          </a:p>
+          <a:p>
+            <a:pPr>
+              <a:defRPr sz="1200" b="0">
+                <a:solidFill>
+                  <a:srgbClr val="F8FAFC"/>
+                </a:solidFill>
+                <a:latin typeface="Courier New"/>
+              </a:defRPr>
+            </a:pPr>
+            <a:r>
+              <a:rPr sz="1200" b="0">
+                <a:solidFill>
+                  <a:srgbClr val="F8FAFC"/>
+                </a:solidFill>
+                <a:latin typeface="Courier New"/>
+              </a:rPr>
+              <a:t>      "| same:", fmap_same.shape)</a:t>
+            </a:r>
+          </a:p>
+          <a:p>
+            <a:pPr>
+              <a:defRPr sz="1200" b="0">
+                <a:solidFill>
+                  <a:srgbClr val="F8FAFC"/>
+                </a:solidFill>
+                <a:latin typeface="Courier New"/>
+              </a:defRPr>
+            </a:pPr>
+            <a:r>
+              <a:rPr sz="1200" b="0">
+                <a:solidFill>
+                  <a:srgbClr val="F8FAFC"/>
+                </a:solidFill>
+                <a:latin typeface="Courier New"/>
+              </a:rPr>
+              <a:t>print("feature map (same): la respuesta se concentra en el borde")</a:t>
+            </a:r>
+          </a:p>
+          <a:p>
+            <a:pPr>
+              <a:defRPr sz="1200" b="0">
+                <a:solidFill>
+                  <a:srgbClr val="F8FAFC"/>
+                </a:solidFill>
+                <a:latin typeface="Courier New"/>
+              </a:defRPr>
+            </a:pPr>
+            <a:r>
+              <a:rPr sz="1200" b="0">
+                <a:solidFill>
+                  <a:srgbClr val="F8FAFC"/>
+                </a:solidFill>
+                <a:latin typeface="Courier New"/>
+              </a:rPr>
+              <a:t>print(np.round(fmap_same, 1))</a:t>
             </a:r>
           </a:p>
         </p:txBody>

--- a/docs/presentaciones/classes/clase-128-capas-convolucionales-filtros-feature-maps-presentacion.pptx
+++ b/docs/presentaciones/classes/clase-128-capas-convolucionales-filtros-feature-maps-presentacion.pptx
@@ -3272,7 +3272,7 @@
                 </a:solidFill>
                 <a:latin typeface="Segoe UI"/>
               </a:rPr>
-              <a:t>Parte: 2 — Deep Learning · Fuente: Géron, cap. 14 § Convolutional Layers.  Duración estimada: 75 min.</a:t>
+              <a:t>Parte: 2 — Deep Learning · Fuente: Géron, cap. 14 § Convolutional Layers.  Duración estimada: 75 min. · Nivel: Avanzado</a:t>
             </a:r>
           </a:p>
         </p:txBody>
@@ -3581,7 +3581,7 @@
                 </a:solidFill>
                 <a:latin typeface="Segoe UI"/>
               </a:rPr>
-              <a:t>Parte: 2 — Deep Learning · Fuente: Géron, cap. 14 § Convolutional Layers.  Duración estimada: 75 min.</a:t>
+              <a:t>Parte: 2 — Deep Learning · Fuente: Géron, cap. 14 § Convolutional Layers.  Duración estimada: 75 min. · Nivel: Avanzado</a:t>
             </a:r>
           </a:p>
         </p:txBody>
